--- a/FYP/重做PPT/9.24-v3.pptx
+++ b/FYP/重做PPT/9.24-v3.pptx
@@ -3722,7 +3722,7 @@
       </p:pic>
       <p:pic>
         <p:nvPicPr>
-          <p:cNvPr id="5" name="Picture 4" descr="fig_nc2026_fig1_full.png"/>
+          <p:cNvPr id="5" name="Picture 4" descr="use_nc_fig2_full.png"/>
           <p:cNvPicPr>
             <a:picLocks noChangeAspect="1"/>
           </p:cNvPicPr>
@@ -3736,8 +3736,8 @@
         </p:blipFill>
         <p:spPr>
           <a:xfrm>
-            <a:off x="908276" y="1143000"/>
-            <a:ext cx="3669846" cy="3886200"/>
+            <a:off x="640080" y="1170432"/>
+            <a:ext cx="6309359" cy="3165637"/>
           </a:xfrm>
           <a:prstGeom prst="rect">
             <a:avLst/>
@@ -3752,8 +3752,8 @@
         </p:nvSpPr>
         <p:spPr>
           <a:xfrm>
-            <a:off x="5166360" y="1115568"/>
-            <a:ext cx="6382512" cy="1298448"/>
+            <a:off x="7223760" y="1170432"/>
+            <a:ext cx="4325112" cy="1051560"/>
           </a:xfrm>
           <a:prstGeom prst="roundRect">
             <a:avLst/>
@@ -3810,7 +3810,7 @@
                 </a:solidFill>
                 <a:latin typeface="Arial"/>
               </a:rPr>
-              <a:t>The MnO₂ framework holds ruthenium near +4, outside the RuO₄ window, and the surface hydroxyls take part in the reaction (Nat. Commun. 2026, Fig. 1).</a:t>
+              <a:t>The MnO₂ framework holds Ru near +4, outside the RuO₄ window.</a:t>
             </a:r>
           </a:p>
         </p:txBody>
@@ -3823,8 +3823,8 @@
         </p:nvSpPr>
         <p:spPr>
           <a:xfrm>
-            <a:off x="5166360" y="2523744"/>
-            <a:ext cx="6382512" cy="1298448"/>
+            <a:off x="7223760" y="2331720"/>
+            <a:ext cx="4325112" cy="1371600"/>
           </a:xfrm>
           <a:prstGeom prst="roundRect">
             <a:avLst/>
@@ -3881,7 +3881,7 @@
                 </a:solidFill>
                 <a:latin typeface="Arial"/>
               </a:rPr>
-              <a:t>The same idea is demonstrated with iridium: electrodeposited MnO₂ oxidises the metal and drives it in, forming M–O–Mn bridges (Science 2024, Fig. 1A).</a:t>
+              <a:t>Electrodeposited MnO₂ oxidises the metal and drives it in, forming M–O–Mn bridges; EXAFS shows the Ru–O–Mn shell.</a:t>
             </a:r>
           </a:p>
         </p:txBody>
@@ -3894,8 +3894,8 @@
         </p:nvSpPr>
         <p:spPr>
           <a:xfrm>
-            <a:off x="5166360" y="3931920"/>
-            <a:ext cx="6382512" cy="1298448"/>
+            <a:off x="7223760" y="3840480"/>
+            <a:ext cx="4325112" cy="1051560"/>
           </a:xfrm>
           <a:prstGeom prst="roundRect">
             <a:avLst/>
@@ -3952,7 +3952,7 @@
                 </a:solidFill>
                 <a:latin typeface="Arial"/>
               </a:rPr>
-              <a:t>Deposition charge, current and bath pH set the phase and the edge-site density, so the density of Ru–O–Mn coupling becomes a process variable we can scan.</a:t>
+              <a:t>Deposition charge, current and bath pH set the phase and edge-site density.</a:t>
             </a:r>
           </a:p>
         </p:txBody>
@@ -3965,8 +3965,8 @@
         </p:nvSpPr>
         <p:spPr>
           <a:xfrm>
-            <a:off x="640080" y="5303520"/>
-            <a:ext cx="10908792" cy="310896"/>
+            <a:off x="640080" y="4754880"/>
+            <a:ext cx="10908792" cy="582930"/>
           </a:xfrm>
           <a:prstGeom prst="rect">
             <a:avLst/>
@@ -3985,7 +3985,23 @@
               </a:spcAft>
             </a:pPr>
             <a:r>
-              <a:rPr sz="1600" b="1">
+              <a:rPr sz="1600" b="0">
+                <a:solidFill>
+                  <a:srgbClr val="1F2937"/>
+                </a:solidFill>
+                <a:latin typeface="Arial"/>
+              </a:rPr>
+              <a:t>Figure: synthesis route and structure of Ru₀.₀₃Mn₀.₉₇O₂ — (a) synthesis, (b–e) XRD, STEM and EDS, (f–h) Ru K-edge EXAFS and XANES and Mn 3s XPS.</a:t>
+            </a:r>
+          </a:p>
+          <a:p>
+            <a:pPr algn="l">
+              <a:spcAft>
+                <a:spcPts val="400"/>
+              </a:spcAft>
+            </a:pPr>
+            <a:r>
+              <a:rPr sz="1700" b="1">
                 <a:solidFill>
                   <a:srgbClr val="C0392B"/>
                 </a:solidFill>
@@ -4025,7 +4041,7 @@
                 </a:solidFill>
                 <a:latin typeface="Arial"/>
               </a:rPr>
-              <a:t>Nat. Commun. 2026, Fig. 1 (Ru–MnO₂ architecture)  ·  Science 2024, 384, 666, Fig. 1A (precedent with Ir).</a:t>
+              <a:t>Nat. Commun. 2026, 17, 7657, Fig. 2  ·  Science 2024, 384, 666, Fig. 1A (precedent with Ir).</a:t>
             </a:r>
           </a:p>
         </p:txBody>
@@ -4549,7 +4565,7 @@
         <p:spPr>
           <a:xfrm>
             <a:off x="640080" y="5532120"/>
-            <a:ext cx="10908792" cy="310896"/>
+            <a:ext cx="10908792" cy="326898"/>
           </a:xfrm>
           <a:prstGeom prst="rect">
             <a:avLst/>
@@ -4568,7 +4584,7 @@
               </a:spcAft>
             </a:pPr>
             <a:r>
-              <a:rPr sz="1600" b="1">
+              <a:rPr sz="1700" b="1">
                 <a:solidFill>
                   <a:srgbClr val="C0392B"/>
                 </a:solidFill>
@@ -4801,7 +4817,7 @@
         <p:spPr>
           <a:xfrm>
             <a:off x="640080" y="5120640"/>
-            <a:ext cx="10908792" cy="550926"/>
+            <a:ext cx="10908792" cy="854964"/>
           </a:xfrm>
           <a:prstGeom prst="rect">
             <a:avLst/>
@@ -4820,7 +4836,7 @@
               </a:spcAft>
             </a:pPr>
             <a:r>
-              <a:rPr sz="1500" b="0">
+              <a:rPr sz="1600" b="0">
                 <a:solidFill>
                   <a:srgbClr val="1F2937"/>
                 </a:solidFill>
@@ -4836,7 +4852,7 @@
               </a:spcAft>
             </a:pPr>
             <a:r>
-              <a:rPr sz="1600" b="1">
+              <a:rPr sz="1700" b="1">
                 <a:solidFill>
                   <a:srgbClr val="C0392B"/>
                 </a:solidFill>
@@ -5174,7 +5190,7 @@
           <a:p>
             <a:pPr algn="ctr"/>
             <a:r>
-              <a:rPr sz="1700" b="1">
+              <a:rPr sz="1800" b="1">
                 <a:solidFill>
                   <a:srgbClr val="003D7C"/>
                 </a:solidFill>
@@ -5190,7 +5206,7 @@
               </a:spcBef>
             </a:pPr>
             <a:r>
-              <a:rPr sz="1400">
+              <a:rPr sz="1500">
                 <a:solidFill>
                   <a:srgbClr val="1F2937"/>
                 </a:solidFill>
@@ -5245,7 +5261,7 @@
           <a:p>
             <a:pPr algn="ctr"/>
             <a:r>
-              <a:rPr sz="1700" b="1">
+              <a:rPr sz="1800" b="1">
                 <a:solidFill>
                   <a:srgbClr val="003D7C"/>
                 </a:solidFill>
@@ -5261,7 +5277,7 @@
               </a:spcBef>
             </a:pPr>
             <a:r>
-              <a:rPr sz="1400">
+              <a:rPr sz="1500">
                 <a:solidFill>
                   <a:srgbClr val="1F2937"/>
                 </a:solidFill>
@@ -5281,7 +5297,7 @@
         <p:spPr>
           <a:xfrm>
             <a:off x="640080" y="5349240"/>
-            <a:ext cx="10908792" cy="310896"/>
+            <a:ext cx="10908792" cy="326898"/>
           </a:xfrm>
           <a:prstGeom prst="rect">
             <a:avLst/>
@@ -5300,7 +5316,7 @@
               </a:spcAft>
             </a:pPr>
             <a:r>
-              <a:rPr sz="1600" b="1">
+              <a:rPr sz="1700" b="1">
                 <a:solidFill>
                   <a:srgbClr val="C0392B"/>
                 </a:solidFill>
@@ -5557,7 +5573,7 @@
         <p:spPr>
           <a:xfrm>
             <a:off x="640080" y="5029200"/>
-            <a:ext cx="10908792" cy="790956"/>
+            <a:ext cx="10908792" cy="838962"/>
           </a:xfrm>
           <a:prstGeom prst="rect">
             <a:avLst/>
@@ -5576,7 +5592,7 @@
               </a:spcAft>
             </a:pPr>
             <a:r>
-              <a:rPr sz="1500" b="0">
+              <a:rPr sz="1600" b="0">
                 <a:solidFill>
                   <a:srgbClr val="1F2937"/>
                 </a:solidFill>
@@ -5592,7 +5608,7 @@
               </a:spcAft>
             </a:pPr>
             <a:r>
-              <a:rPr sz="1500" b="0">
+              <a:rPr sz="1600" b="0">
                 <a:solidFill>
                   <a:srgbClr val="1F2937"/>
                 </a:solidFill>
@@ -5608,7 +5624,7 @@
               </a:spcAft>
             </a:pPr>
             <a:r>
-              <a:rPr sz="1600" b="1">
+              <a:rPr sz="1700" b="1">
                 <a:solidFill>
                   <a:srgbClr val="C0392B"/>
                 </a:solidFill>
@@ -5865,7 +5881,7 @@
         <p:spPr>
           <a:xfrm>
             <a:off x="640080" y="5029200"/>
-            <a:ext cx="10908792" cy="790956"/>
+            <a:ext cx="10908792" cy="838962"/>
           </a:xfrm>
           <a:prstGeom prst="rect">
             <a:avLst/>
@@ -5884,7 +5900,7 @@
               </a:spcAft>
             </a:pPr>
             <a:r>
-              <a:rPr sz="1500" b="0">
+              <a:rPr sz="1600" b="0">
                 <a:solidFill>
                   <a:srgbClr val="1F2937"/>
                 </a:solidFill>
@@ -5900,7 +5916,7 @@
               </a:spcAft>
             </a:pPr>
             <a:r>
-              <a:rPr sz="1500" b="0">
+              <a:rPr sz="1600" b="0">
                 <a:solidFill>
                   <a:srgbClr val="1F2937"/>
                 </a:solidFill>
@@ -5916,7 +5932,7 @@
               </a:spcAft>
             </a:pPr>
             <a:r>
-              <a:rPr sz="1600" b="1">
+              <a:rPr sz="1700" b="1">
                 <a:solidFill>
                   <a:srgbClr val="C0392B"/>
                 </a:solidFill>
@@ -6291,7 +6307,7 @@
         <p:spPr>
           <a:xfrm>
             <a:off x="640080" y="4892040"/>
-            <a:ext cx="10908792" cy="550926"/>
+            <a:ext cx="10908792" cy="582930"/>
           </a:xfrm>
           <a:prstGeom prst="rect">
             <a:avLst/>
@@ -6310,7 +6326,7 @@
               </a:spcAft>
             </a:pPr>
             <a:r>
-              <a:rPr sz="1500" b="0">
+              <a:rPr sz="1600" b="0">
                 <a:solidFill>
                   <a:srgbClr val="1F2937"/>
                 </a:solidFill>
@@ -6326,7 +6342,7 @@
               </a:spcAft>
             </a:pPr>
             <a:r>
-              <a:rPr sz="1600" b="1">
+              <a:rPr sz="1700" b="1">
                 <a:solidFill>
                   <a:srgbClr val="C0392B"/>
                 </a:solidFill>
@@ -6594,7 +6610,7 @@
           <a:p>
             <a:pPr algn="ctr"/>
             <a:r>
-              <a:rPr sz="1700" b="1">
+              <a:rPr sz="1800" b="1">
                 <a:solidFill>
                   <a:srgbClr val="003D7C"/>
                 </a:solidFill>
@@ -6610,7 +6626,7 @@
               </a:spcBef>
             </a:pPr>
             <a:r>
-              <a:rPr sz="1400">
+              <a:rPr sz="1500">
                 <a:solidFill>
                   <a:srgbClr val="1F2937"/>
                 </a:solidFill>
@@ -6665,7 +6681,7 @@
           <a:p>
             <a:pPr algn="ctr"/>
             <a:r>
-              <a:rPr sz="1700" b="1">
+              <a:rPr sz="1800" b="1">
                 <a:solidFill>
                   <a:srgbClr val="003D7C"/>
                 </a:solidFill>
@@ -6681,7 +6697,7 @@
               </a:spcBef>
             </a:pPr>
             <a:r>
-              <a:rPr sz="1400">
+              <a:rPr sz="1500">
                 <a:solidFill>
                   <a:srgbClr val="1F2937"/>
                 </a:solidFill>
@@ -6701,7 +6717,7 @@
         <p:spPr>
           <a:xfrm>
             <a:off x="640080" y="5257800"/>
-            <a:ext cx="10908792" cy="310896"/>
+            <a:ext cx="10908792" cy="326898"/>
           </a:xfrm>
           <a:prstGeom prst="rect">
             <a:avLst/>
@@ -6720,7 +6736,7 @@
               </a:spcAft>
             </a:pPr>
             <a:r>
-              <a:rPr sz="1600" b="1">
+              <a:rPr sz="1700" b="1">
                 <a:solidFill>
                   <a:srgbClr val="C0392B"/>
                 </a:solidFill>
@@ -6988,7 +7004,7 @@
           <a:p>
             <a:pPr algn="ctr"/>
             <a:r>
-              <a:rPr sz="1700" b="1">
+              <a:rPr sz="1800" b="1">
                 <a:solidFill>
                   <a:srgbClr val="003D7C"/>
                 </a:solidFill>
@@ -7004,7 +7020,7 @@
               </a:spcBef>
             </a:pPr>
             <a:r>
-              <a:rPr sz="1400">
+              <a:rPr sz="1500">
                 <a:solidFill>
                   <a:srgbClr val="1F2937"/>
                 </a:solidFill>
@@ -7059,7 +7075,7 @@
           <a:p>
             <a:pPr algn="ctr"/>
             <a:r>
-              <a:rPr sz="1700" b="1">
+              <a:rPr sz="1800" b="1">
                 <a:solidFill>
                   <a:srgbClr val="003D7C"/>
                 </a:solidFill>
@@ -7075,7 +7091,7 @@
               </a:spcBef>
             </a:pPr>
             <a:r>
-              <a:rPr sz="1400">
+              <a:rPr sz="1500">
                 <a:solidFill>
                   <a:srgbClr val="1F2937"/>
                 </a:solidFill>
@@ -7130,7 +7146,7 @@
           <a:p>
             <a:pPr algn="ctr"/>
             <a:r>
-              <a:rPr sz="1700" b="1">
+              <a:rPr sz="1800" b="1">
                 <a:solidFill>
                   <a:srgbClr val="003D7C"/>
                 </a:solidFill>
@@ -7146,7 +7162,7 @@
               </a:spcBef>
             </a:pPr>
             <a:r>
-              <a:rPr sz="1400">
+              <a:rPr sz="1500">
                 <a:solidFill>
                   <a:srgbClr val="1F2937"/>
                 </a:solidFill>
@@ -7166,7 +7182,7 @@
         <p:spPr>
           <a:xfrm>
             <a:off x="640080" y="5303520"/>
-            <a:ext cx="10908792" cy="310896"/>
+            <a:ext cx="10908792" cy="326898"/>
           </a:xfrm>
           <a:prstGeom prst="rect">
             <a:avLst/>
@@ -7185,7 +7201,7 @@
               </a:spcAft>
             </a:pPr>
             <a:r>
-              <a:rPr sz="1600" b="1">
+              <a:rPr sz="1700" b="1">
                 <a:solidFill>
                   <a:srgbClr val="C0392B"/>
                 </a:solidFill>
@@ -7586,7 +7602,7 @@
         <p:spPr>
           <a:xfrm>
             <a:off x="640080" y="4892040"/>
-            <a:ext cx="10908792" cy="550926"/>
+            <a:ext cx="10908792" cy="582930"/>
           </a:xfrm>
           <a:prstGeom prst="rect">
             <a:avLst/>
@@ -7605,7 +7621,7 @@
               </a:spcAft>
             </a:pPr>
             <a:r>
-              <a:rPr sz="1500" b="0">
+              <a:rPr sz="1600" b="0">
                 <a:solidFill>
                   <a:srgbClr val="1F2937"/>
                 </a:solidFill>
@@ -7621,7 +7637,7 @@
               </a:spcAft>
             </a:pPr>
             <a:r>
-              <a:rPr sz="1600" b="1">
+              <a:rPr sz="1700" b="1">
                 <a:solidFill>
                   <a:srgbClr val="C0392B"/>
                 </a:solidFill>

--- a/FYP/重做PPT/9.24-v3.pptx
+++ b/FYP/重做PPT/9.24-v3.pptx
@@ -4201,370 +4201,39 @@
           </a:prstGeom>
         </p:spPr>
       </p:pic>
-      <p:sp>
-        <p:nvSpPr>
-          <p:cNvPr id="5" name="Rounded Rectangle 4"/>
-          <p:cNvSpPr/>
-          <p:nvPr/>
-        </p:nvSpPr>
-        <p:spPr>
-          <a:xfrm>
-            <a:off x="640080" y="1097280"/>
-            <a:ext cx="10908792" cy="786384"/>
-          </a:xfrm>
-          <a:prstGeom prst="roundRect">
-            <a:avLst/>
-          </a:prstGeom>
-          <a:solidFill>
-            <a:srgbClr val="EFF5FB"/>
-          </a:solidFill>
-          <a:ln w="12700">
-            <a:solidFill>
-              <a:srgbClr val="CFE0F2"/>
-            </a:solidFill>
-          </a:ln>
-          <a:effectLst/>
-        </p:spPr>
-        <p:style>
-          <a:lnRef idx="1">
-            <a:schemeClr val="accent1"/>
-          </a:lnRef>
-          <a:fillRef idx="3">
-            <a:schemeClr val="accent1"/>
-          </a:fillRef>
-          <a:effectRef idx="2">
-            <a:schemeClr val="accent1"/>
-          </a:effectRef>
-          <a:fontRef idx="minor">
-            <a:schemeClr val="lt1"/>
-          </a:fontRef>
-        </p:style>
-        <p:txBody>
-          <a:bodyPr rtlCol="0" anchor="t" wrap="square" lIns="146304" rIns="146304" tIns="82296" bIns="82296"/>
-          <a:lstStyle/>
-          <a:p>
-            <a:pPr algn="ctr"/>
-            <a:r>
-              <a:rPr sz="1600" b="1">
-                <a:solidFill>
-                  <a:srgbClr val="003D7C"/>
-                </a:solidFill>
-                <a:latin typeface="Arial"/>
-              </a:rPr>
-              <a:t>1  Electrodeposit MnO₂</a:t>
-            </a:r>
-          </a:p>
-          <a:p>
-            <a:pPr>
-              <a:spcBef>
-                <a:spcPts val="400"/>
-              </a:spcBef>
-            </a:pPr>
-            <a:r>
-              <a:rPr sz="1400">
-                <a:solidFill>
-                  <a:srgbClr val="1F2937"/>
-                </a:solidFill>
-                <a:latin typeface="Arial"/>
-              </a:rPr>
-              <a:t>Ti mesh or Ti felt; 7 mA cm⁻² for 15 min (≈6.3 C cm⁻²); current and bath pH as variables.</a:t>
-            </a:r>
-          </a:p>
-        </p:txBody>
-      </p:sp>
-      <p:sp>
-        <p:nvSpPr>
-          <p:cNvPr id="6" name="Rounded Rectangle 5"/>
-          <p:cNvSpPr/>
-          <p:nvPr/>
-        </p:nvSpPr>
-        <p:spPr>
-          <a:xfrm>
-            <a:off x="640080" y="1984248"/>
-            <a:ext cx="10908792" cy="786384"/>
-          </a:xfrm>
-          <a:prstGeom prst="roundRect">
-            <a:avLst/>
-          </a:prstGeom>
-          <a:solidFill>
-            <a:srgbClr val="EFF5FB"/>
-          </a:solidFill>
-          <a:ln w="12700">
-            <a:solidFill>
-              <a:srgbClr val="CFE0F2"/>
-            </a:solidFill>
-          </a:ln>
-          <a:effectLst/>
-        </p:spPr>
-        <p:style>
-          <a:lnRef idx="1">
-            <a:schemeClr val="accent1"/>
-          </a:lnRef>
-          <a:fillRef idx="3">
-            <a:schemeClr val="accent1"/>
-          </a:fillRef>
-          <a:effectRef idx="2">
-            <a:schemeClr val="accent1"/>
-          </a:effectRef>
-          <a:fontRef idx="minor">
-            <a:schemeClr val="lt1"/>
-          </a:fontRef>
-        </p:style>
-        <p:txBody>
-          <a:bodyPr rtlCol="0" anchor="t" wrap="square" lIns="146304" rIns="146304" tIns="82296" bIns="82296"/>
-          <a:lstStyle/>
-          <a:p>
-            <a:pPr algn="ctr"/>
-            <a:r>
-              <a:rPr sz="1600" b="1">
-                <a:solidFill>
-                  <a:srgbClr val="003D7C"/>
-                </a:solidFill>
-                <a:latin typeface="Arial"/>
-              </a:rPr>
-              <a:t>2  Find the stability window</a:t>
-            </a:r>
-          </a:p>
-          <a:p>
-            <a:pPr>
-              <a:spcBef>
-                <a:spcPts val="400"/>
-              </a:spcBef>
-            </a:pPr>
-            <a:r>
-              <a:rPr sz="1400">
-                <a:solidFill>
-                  <a:srgbClr val="1F2937"/>
-                </a:solidFill>
-                <a:latin typeface="Arial"/>
-              </a:rPr>
-              <a:t>Potential-step scan 1.40 → 1.90 V vs RHE with segmented ICP-MS, ruthenium and manganese separately.</a:t>
-            </a:r>
-          </a:p>
-        </p:txBody>
-      </p:sp>
-      <p:sp>
-        <p:nvSpPr>
-          <p:cNvPr id="7" name="Rounded Rectangle 6"/>
-          <p:cNvSpPr/>
-          <p:nvPr/>
-        </p:nvSpPr>
-        <p:spPr>
-          <a:xfrm>
-            <a:off x="640080" y="2871215"/>
-            <a:ext cx="10908792" cy="786384"/>
-          </a:xfrm>
-          <a:prstGeom prst="roundRect">
-            <a:avLst/>
-          </a:prstGeom>
-          <a:solidFill>
-            <a:srgbClr val="EFF5FB"/>
-          </a:solidFill>
-          <a:ln w="12700">
-            <a:solidFill>
-              <a:srgbClr val="CFE0F2"/>
-            </a:solidFill>
-          </a:ln>
-          <a:effectLst/>
-        </p:spPr>
-        <p:style>
-          <a:lnRef idx="1">
-            <a:schemeClr val="accent1"/>
-          </a:lnRef>
-          <a:fillRef idx="3">
-            <a:schemeClr val="accent1"/>
-          </a:fillRef>
-          <a:effectRef idx="2">
-            <a:schemeClr val="accent1"/>
-          </a:effectRef>
-          <a:fontRef idx="minor">
-            <a:schemeClr val="lt1"/>
-          </a:fontRef>
-        </p:style>
-        <p:txBody>
-          <a:bodyPr rtlCol="0" anchor="t" wrap="square" lIns="146304" rIns="146304" tIns="82296" bIns="82296"/>
-          <a:lstStyle/>
-          <a:p>
-            <a:pPr algn="ctr"/>
-            <a:r>
-              <a:rPr sz="1600" b="1">
-                <a:solidFill>
-                  <a:srgbClr val="003D7C"/>
-                </a:solidFill>
-                <a:latin typeface="Arial"/>
-              </a:rPr>
-              <a:t>3  Cation exchange with Ru</a:t>
-            </a:r>
-          </a:p>
-          <a:p>
-            <a:pPr>
-              <a:spcBef>
-                <a:spcPts val="400"/>
-              </a:spcBef>
-            </a:pPr>
-            <a:r>
-              <a:rPr sz="1400">
-                <a:solidFill>
-                  <a:srgbClr val="1F2937"/>
-                </a:solidFill>
-                <a:latin typeface="Arial"/>
-              </a:rPr>
-              <a:t>Bring ruthenium into the MnO₂ framework; impregnated and co-deposited controls in parallel.</a:t>
-            </a:r>
-          </a:p>
-        </p:txBody>
-      </p:sp>
-      <p:sp>
-        <p:nvSpPr>
-          <p:cNvPr id="8" name="Rounded Rectangle 7"/>
-          <p:cNvSpPr/>
-          <p:nvPr/>
-        </p:nvSpPr>
-        <p:spPr>
-          <a:xfrm>
-            <a:off x="640080" y="3758183"/>
-            <a:ext cx="10908792" cy="786384"/>
-          </a:xfrm>
-          <a:prstGeom prst="roundRect">
-            <a:avLst/>
-          </a:prstGeom>
-          <a:solidFill>
-            <a:srgbClr val="EFF5FB"/>
-          </a:solidFill>
-          <a:ln w="12700">
-            <a:solidFill>
-              <a:srgbClr val="CFE0F2"/>
-            </a:solidFill>
-          </a:ln>
-          <a:effectLst/>
-        </p:spPr>
-        <p:style>
-          <a:lnRef idx="1">
-            <a:schemeClr val="accent1"/>
-          </a:lnRef>
-          <a:fillRef idx="3">
-            <a:schemeClr val="accent1"/>
-          </a:fillRef>
-          <a:effectRef idx="2">
-            <a:schemeClr val="accent1"/>
-          </a:effectRef>
-          <a:fontRef idx="minor">
-            <a:schemeClr val="lt1"/>
-          </a:fontRef>
-        </p:style>
-        <p:txBody>
-          <a:bodyPr rtlCol="0" anchor="t" wrap="square" lIns="146304" rIns="146304" tIns="82296" bIns="82296"/>
-          <a:lstStyle/>
-          <a:p>
-            <a:pPr algn="ctr"/>
-            <a:r>
-              <a:rPr sz="1600" b="1">
-                <a:solidFill>
-                  <a:srgbClr val="003D7C"/>
-                </a:solidFill>
-                <a:latin typeface="Arial"/>
-              </a:rPr>
-              <a:t>4  Prove Ru is inside</a:t>
-            </a:r>
-          </a:p>
-          <a:p>
-            <a:pPr>
-              <a:spcBef>
-                <a:spcPts val="400"/>
-              </a:spcBef>
-            </a:pPr>
-            <a:r>
-              <a:rPr sz="1400">
-                <a:solidFill>
-                  <a:srgbClr val="1F2937"/>
-                </a:solidFill>
-                <a:latin typeface="Arial"/>
-              </a:rPr>
-              <a:t>EXAFS: Ru–O–Mn appears while Ru–O–Ru weakens; paired XPS, Raman and STEM before and after activation.</a:t>
-            </a:r>
-          </a:p>
-        </p:txBody>
-      </p:sp>
-      <p:sp>
-        <p:nvSpPr>
-          <p:cNvPr id="9" name="Rounded Rectangle 8"/>
-          <p:cNvSpPr/>
-          <p:nvPr/>
-        </p:nvSpPr>
-        <p:spPr>
-          <a:xfrm>
-            <a:off x="640080" y="4645151"/>
-            <a:ext cx="10908792" cy="786384"/>
-          </a:xfrm>
-          <a:prstGeom prst="roundRect">
-            <a:avLst/>
-          </a:prstGeom>
-          <a:solidFill>
-            <a:srgbClr val="EFF5FB"/>
-          </a:solidFill>
-          <a:ln w="12700">
-            <a:solidFill>
-              <a:srgbClr val="CFE0F2"/>
-            </a:solidFill>
-          </a:ln>
-          <a:effectLst/>
-        </p:spPr>
-        <p:style>
-          <a:lnRef idx="1">
-            <a:schemeClr val="accent1"/>
-          </a:lnRef>
-          <a:fillRef idx="3">
-            <a:schemeClr val="accent1"/>
-          </a:fillRef>
-          <a:effectRef idx="2">
-            <a:schemeClr val="accent1"/>
-          </a:effectRef>
-          <a:fontRef idx="minor">
-            <a:schemeClr val="lt1"/>
-          </a:fontRef>
-        </p:style>
-        <p:txBody>
-          <a:bodyPr rtlCol="0" anchor="t" wrap="square" lIns="146304" rIns="146304" tIns="82296" bIns="82296"/>
-          <a:lstStyle/>
-          <a:p>
-            <a:pPr algn="ctr"/>
-            <a:r>
-              <a:rPr sz="1600" b="1">
-                <a:solidFill>
-                  <a:srgbClr val="003D7C"/>
-                </a:solidFill>
-                <a:latin typeface="Arial"/>
-              </a:rPr>
-              <a:t>5  Test and scale to a device</a:t>
-            </a:r>
-          </a:p>
-          <a:p>
-            <a:pPr>
-              <a:spcBef>
-                <a:spcPts val="400"/>
-              </a:spcBef>
-            </a:pPr>
-            <a:r>
-              <a:rPr sz="1400">
-                <a:solidFill>
-                  <a:srgbClr val="1F2937"/>
-                </a:solidFill>
-                <a:latin typeface="Arial"/>
-              </a:rPr>
-              <a:t>η10, Tafel, EIS and ECSA; long-term chronopotentiometry with ICP-MS, then a single-cell PEM test.</a:t>
-            </a:r>
-          </a:p>
-        </p:txBody>
-      </p:sp>
-      <p:sp>
-        <p:nvSpPr>
-          <p:cNvPr id="10" name="TextBox 9"/>
+      <p:pic>
+        <p:nvPicPr>
+          <p:cNvPr id="5" name="Picture 4" descr="fig_plan.png"/>
+          <p:cNvPicPr>
+            <a:picLocks noChangeAspect="1"/>
+          </p:cNvPicPr>
+          <p:nvPr/>
+        </p:nvPicPr>
+        <p:blipFill>
+          <a:blip r:embed="rId3"/>
+          <a:stretch>
+            <a:fillRect/>
+          </a:stretch>
+        </p:blipFill>
+        <p:spPr>
+          <a:xfrm>
+            <a:off x="653796" y="1024128"/>
+            <a:ext cx="10881360" cy="4114800"/>
+          </a:xfrm>
+          <a:prstGeom prst="rect">
+            <a:avLst/>
+          </a:prstGeom>
+        </p:spPr>
+      </p:pic>
+      <p:sp>
+        <p:nvSpPr>
+          <p:cNvPr id="6" name="TextBox 5"/>
           <p:cNvSpPr txBox="1"/>
           <p:nvPr/>
         </p:nvSpPr>
         <p:spPr>
           <a:xfrm>
-            <a:off x="640080" y="5532120"/>
+            <a:off x="640080" y="5349240"/>
             <a:ext cx="10908792" cy="326898"/>
           </a:xfrm>
           <a:prstGeom prst="rect">
@@ -4590,14 +4259,14 @@
                 </a:solidFill>
                 <a:latin typeface="Arial"/>
               </a:rPr>
-              <a:t>First priority is step 2: if manganese dissolves much faster than ruthenium and cannot be suppressed, the phase or the oxygen coordination is changed before any optimisation.</a:t>
-            </a:r>
-          </a:p>
-        </p:txBody>
-      </p:sp>
-      <p:sp>
-        <p:nvSpPr>
-          <p:cNvPr id="11" name="TextBox 10"/>
+              <a:t>First priority is step 2: the go/no-go on whether manganese or ruthenium dissolves first, and at which potential.</a:t>
+            </a:r>
+          </a:p>
+        </p:txBody>
+      </p:sp>
+      <p:sp>
+        <p:nvSpPr>
+          <p:cNvPr id="7" name="TextBox 6"/>
           <p:cNvSpPr txBox="1"/>
           <p:nvPr/>
         </p:nvSpPr>
@@ -4624,14 +4293,14 @@
                 </a:solidFill>
                 <a:latin typeface="Arial"/>
               </a:rPr>
-              <a:t>Characterisation and testing practice follows Adv. Energy Mater. 2023 §5 and Science 2024 (device-level reporting).</a:t>
-            </a:r>
-          </a:p>
-        </p:txBody>
-      </p:sp>
-      <p:sp>
-        <p:nvSpPr>
-          <p:cNvPr id="12" name="TextBox 11"/>
+              <a:t>Schematic drawn for this project: parameters per the group protocol; characterisation and testing practice follow Adv. Energy Mater. 2023 §5.</a:t>
+            </a:r>
+          </a:p>
+        </p:txBody>
+      </p:sp>
+      <p:sp>
+        <p:nvSpPr>
+          <p:cNvPr id="8" name="TextBox 7"/>
           <p:cNvSpPr txBox="1"/>
           <p:nvPr/>
         </p:nvSpPr>
